--- a/neerlandais1/powerpoints/Module_12_Modale_werkwoorden.pptx
+++ b/neerlandais1/powerpoints/Module_12_Modale_werkwoorden.pptx
@@ -133,18 +133,18 @@
   <p:extLst>
     <p:ext uri="{521415D9-36F7-43E2-AB2F-B90AF26B5E84}">
       <p14:sectionLst xmlns:p14="http://schemas.microsoft.com/office/powerpoint/2010/main">
-        <p14:section name="Ouverture" id="{9f0ea34e-fcbe-e71d-4948-b4980b23fb0c}">
+        <p14:section name="Ouverture" id="{b704be77-97b5-a9d3-e8c0-fd94a0444ccd}">
           <p14:sldIdLst>
             <p14:sldId id="256"/>
           </p14:sldIdLst>
         </p14:section>
-        <p14:section name="Découvrir" id="{8db83188-7798-b557-fff9-7f91a3a7718d}">
+        <p14:section name="Découvrir" id="{1e8f17a6-76e8-c520-d85b-44b254778737}">
           <p14:sldIdLst>
             <p14:sldId id="257"/>
             <p14:sldId id="258"/>
           </p14:sldIdLst>
         </p14:section>
-        <p14:section name="Comprendre" id="{9cc875a1-7c6e-ff97-3547-407dacb52cea}">
+        <p14:section name="Comprendre" id="{476eecd8-b10d-8db7-c3cc-ee3d33a4f6e9}">
           <p14:sldIdLst>
             <p14:sldId id="259"/>
             <p14:sldId id="260"/>
@@ -158,7 +158,7 @@
             <p14:sldId id="268"/>
           </p14:sldIdLst>
         </p14:section>
-        <p14:section name="JIJ NU ! — Oefeningen" id="{fb0e2e81-951b-afb0-64b2-691fa3d1b3f2}">
+        <p14:section name="JIJ NU ! — Oefeningen" id="{eed4cfbf-480a-00c5-489b-29bbfedc20c5}">
           <p14:sldIdLst>
             <p14:sldId id="269"/>
             <p14:sldId id="270"/>
@@ -175,7 +175,7 @@
             <p14:sldId id="281"/>
           </p14:sldIdLst>
         </p14:section>
-        <p14:section name="Clôture" id="{5678754a-e731-9f7e-2e34-f48a25daa944}">
+        <p14:section name="Clôture" id="{c04763d9-c556-39dd-dc82-d89da1f2b85e}">
           <p14:sldIdLst>
             <p14:sldId id="282"/>
           </p14:sldIdLst>
@@ -763,7 +763,7 @@
             <a:r>
               <a:rPr lang="en-US" dirty="0"/>
               <a:t>Objectif : Reconnaître et utiliser zullen dans deux emplois fréquents.
-zullen sert aussi au futur, mais le néerlandais emploie surtout le présent (Morgen bel ik je) : l'archive (Hij zal 38 uur per week werken) surutilise le futur. Le jeu « Vertel wat je dinsdagavond zal doen » devient « Wat doe je dinsdagavond? ».</a:t>
+zullen sert aussi au futur, mais le néerlandais emploie surtout le présent (Morgen bel ik je) : l'archive (Hij zal 38 uur per week werken) surutilise le futur. Le jeu « Vertel wat je dinsdagavond zal doen » devient « Wat doe je dinsdagavond? ». Les trois façons de parler du futur sont l'objet du M18.</a:t>
             </a:r>
             <a:endParaRPr lang="en-US" dirty="0"/>
           </a:p>
@@ -3805,7 +3805,7 @@
                   <a:srgbClr val="FFFFFF"/>
                 </a:solidFill>
               </a:rPr>
-              <a:t>MODULE 12 / 15</a:t>
+              <a:t>MODULE 12 / 19</a:t>
             </a:r>
             <a:endParaRPr lang="en-US" sz="1400" dirty="0"/>
           </a:p>

--- a/neerlandais1/powerpoints/Module_12_Modale_werkwoorden.pptx
+++ b/neerlandais1/powerpoints/Module_12_Modale_werkwoorden.pptx
@@ -133,18 +133,18 @@
   <p:extLst>
     <p:ext uri="{521415D9-36F7-43E2-AB2F-B90AF26B5E84}">
       <p14:sectionLst xmlns:p14="http://schemas.microsoft.com/office/powerpoint/2010/main">
-        <p14:section name="Ouverture" id="{b704be77-97b5-a9d3-e8c0-fd94a0444ccd}">
+        <p14:section name="Ouverture" id="{b5f3af16-fc1d-9b1d-d494-e39444bd48e5}">
           <p14:sldIdLst>
             <p14:sldId id="256"/>
           </p14:sldIdLst>
         </p14:section>
-        <p14:section name="Découvrir" id="{1e8f17a6-76e8-c520-d85b-44b254778737}">
+        <p14:section name="Découvrir" id="{1fb7d408-5b0d-830f-6531-dfd219b9ca24}">
           <p14:sldIdLst>
             <p14:sldId id="257"/>
             <p14:sldId id="258"/>
           </p14:sldIdLst>
         </p14:section>
-        <p14:section name="Comprendre" id="{476eecd8-b10d-8db7-c3cc-ee3d33a4f6e9}">
+        <p14:section name="Comprendre" id="{2c3ed431-5b73-8853-d608-ccb35c18ab1f}">
           <p14:sldIdLst>
             <p14:sldId id="259"/>
             <p14:sldId id="260"/>
@@ -158,7 +158,7 @@
             <p14:sldId id="268"/>
           </p14:sldIdLst>
         </p14:section>
-        <p14:section name="JIJ NU ! — Oefeningen" id="{eed4cfbf-480a-00c5-489b-29bbfedc20c5}">
+        <p14:section name="JIJ NU ! — Oefeningen" id="{c724240b-f8fb-602b-2bc2-a70c91f6d465}">
           <p14:sldIdLst>
             <p14:sldId id="269"/>
             <p14:sldId id="270"/>
@@ -175,7 +175,7 @@
             <p14:sldId id="281"/>
           </p14:sldIdLst>
         </p14:section>
-        <p14:section name="Clôture" id="{c04763d9-c556-39dd-dc82-d89da1f2b85e}">
+        <p14:section name="Clôture" id="{84669d3f-37a2-28be-a1fd-759c3e04ad67}">
           <p14:sldIdLst>
             <p14:sldId id="282"/>
           </p14:sldIdLst>
@@ -3805,7 +3805,7 @@
                   <a:srgbClr val="FFFFFF"/>
                 </a:solidFill>
               </a:rPr>
-              <a:t>MODULE 12 / 19</a:t>
+              <a:t>MODULE 12 / 24</a:t>
             </a:r>
             <a:endParaRPr lang="en-US" sz="1400" dirty="0"/>
           </a:p>

--- a/neerlandais1/powerpoints/Module_12_Modale_werkwoorden.pptx
+++ b/neerlandais1/powerpoints/Module_12_Modale_werkwoorden.pptx
@@ -133,18 +133,18 @@
   <p:extLst>
     <p:ext uri="{521415D9-36F7-43E2-AB2F-B90AF26B5E84}">
       <p14:sectionLst xmlns:p14="http://schemas.microsoft.com/office/powerpoint/2010/main">
-        <p14:section name="Ouverture" id="{b5f3af16-fc1d-9b1d-d494-e39444bd48e5}">
+        <p14:section name="Ouverture" id="{b3270c36-b1b5-ef36-d48d-5aec99f51cbd}">
           <p14:sldIdLst>
             <p14:sldId id="256"/>
           </p14:sldIdLst>
         </p14:section>
-        <p14:section name="Découvrir" id="{1fb7d408-5b0d-830f-6531-dfd219b9ca24}">
+        <p14:section name="Découvrir" id="{bb4872c5-1b11-bbd8-d2e4-a68b2d17387e}">
           <p14:sldIdLst>
             <p14:sldId id="257"/>
             <p14:sldId id="258"/>
           </p14:sldIdLst>
         </p14:section>
-        <p14:section name="Comprendre" id="{2c3ed431-5b73-8853-d608-ccb35c18ab1f}">
+        <p14:section name="Comprendre" id="{6694dc8f-075c-6566-3429-f3a8be70f519}">
           <p14:sldIdLst>
             <p14:sldId id="259"/>
             <p14:sldId id="260"/>
@@ -158,7 +158,7 @@
             <p14:sldId id="268"/>
           </p14:sldIdLst>
         </p14:section>
-        <p14:section name="JIJ NU ! — Oefeningen" id="{c724240b-f8fb-602b-2bc2-a70c91f6d465}">
+        <p14:section name="JIJ NU ! — Oefeningen" id="{d79f7005-2aaf-4225-c268-a80c5b6d8752}">
           <p14:sldIdLst>
             <p14:sldId id="269"/>
             <p14:sldId id="270"/>
@@ -175,7 +175,7 @@
             <p14:sldId id="281"/>
           </p14:sldIdLst>
         </p14:section>
-        <p14:section name="Clôture" id="{84669d3f-37a2-28be-a1fd-759c3e04ad67}">
+        <p14:section name="Clôture" id="{471ca1fe-0846-b7fc-01bd-c9f8b5328bd5}">
           <p14:sldIdLst>
             <p14:sldId id="282"/>
           </p14:sldIdLst>
@@ -3805,7 +3805,7 @@
                   <a:srgbClr val="FFFFFF"/>
                 </a:solidFill>
               </a:rPr>
-              <a:t>MODULE 12 / 24</a:t>
+              <a:t>MODULE 12 / 29</a:t>
             </a:r>
             <a:endParaRPr lang="en-US" sz="1400" dirty="0"/>
           </a:p>

--- a/neerlandais1/powerpoints/Module_12_Modale_werkwoorden.pptx
+++ b/neerlandais1/powerpoints/Module_12_Modale_werkwoorden.pptx
@@ -133,18 +133,18 @@
   <p:extLst>
     <p:ext uri="{521415D9-36F7-43E2-AB2F-B90AF26B5E84}">
       <p14:sectionLst xmlns:p14="http://schemas.microsoft.com/office/powerpoint/2010/main">
-        <p14:section name="Ouverture" id="{b3270c36-b1b5-ef36-d48d-5aec99f51cbd}">
+        <p14:section name="Ouverture" id="{9c883c0c-7704-daaa-20c6-8bf7f493c306}">
           <p14:sldIdLst>
             <p14:sldId id="256"/>
           </p14:sldIdLst>
         </p14:section>
-        <p14:section name="Découvrir" id="{bb4872c5-1b11-bbd8-d2e4-a68b2d17387e}">
+        <p14:section name="Découvrir" id="{e0d2300d-d65b-ca3d-036c-ed9b15b87906}">
           <p14:sldIdLst>
             <p14:sldId id="257"/>
             <p14:sldId id="258"/>
           </p14:sldIdLst>
         </p14:section>
-        <p14:section name="Comprendre" id="{6694dc8f-075c-6566-3429-f3a8be70f519}">
+        <p14:section name="Comprendre" id="{c5aca34f-2a68-f84d-9ca7-f4abc112e12a}">
           <p14:sldIdLst>
             <p14:sldId id="259"/>
             <p14:sldId id="260"/>
@@ -158,7 +158,7 @@
             <p14:sldId id="268"/>
           </p14:sldIdLst>
         </p14:section>
-        <p14:section name="JIJ NU ! — Oefeningen" id="{d79f7005-2aaf-4225-c268-a80c5b6d8752}">
+        <p14:section name="JIJ NU ! — Oefeningen" id="{9f4e2ff3-3383-c85b-5e57-221f1ed2536c}">
           <p14:sldIdLst>
             <p14:sldId id="269"/>
             <p14:sldId id="270"/>
@@ -175,7 +175,7 @@
             <p14:sldId id="281"/>
           </p14:sldIdLst>
         </p14:section>
-        <p14:section name="Clôture" id="{471ca1fe-0846-b7fc-01bd-c9f8b5328bd5}">
+        <p14:section name="Clôture" id="{f1ce061a-a44b-acac-b31f-0f1cd97bebc8}">
           <p14:sldIdLst>
             <p14:sldId id="282"/>
           </p14:sldIdLst>
@@ -3805,7 +3805,7 @@
                   <a:srgbClr val="FFFFFF"/>
                 </a:solidFill>
               </a:rPr>
-              <a:t>MODULE 12 / 29</a:t>
+              <a:t>MODULE 12 / 32</a:t>
             </a:r>
             <a:endParaRPr lang="en-US" sz="1400" dirty="0"/>
           </a:p>

--- a/neerlandais1/powerpoints/Module_12_Modale_werkwoorden.pptx
+++ b/neerlandais1/powerpoints/Module_12_Modale_werkwoorden.pptx
@@ -133,18 +133,18 @@
   <p:extLst>
     <p:ext uri="{521415D9-36F7-43E2-AB2F-B90AF26B5E84}">
       <p14:sectionLst xmlns:p14="http://schemas.microsoft.com/office/powerpoint/2010/main">
-        <p14:section name="Ouverture" id="{9c883c0c-7704-daaa-20c6-8bf7f493c306}">
+        <p14:section name="Ouverture" id="{cf7883ae-ffc7-2106-f1b8-087cfb6e450a}">
           <p14:sldIdLst>
             <p14:sldId id="256"/>
           </p14:sldIdLst>
         </p14:section>
-        <p14:section name="Découvrir" id="{e0d2300d-d65b-ca3d-036c-ed9b15b87906}">
+        <p14:section name="Découvrir" id="{1510903e-412b-bee2-eacf-50737a51339d}">
           <p14:sldIdLst>
             <p14:sldId id="257"/>
             <p14:sldId id="258"/>
           </p14:sldIdLst>
         </p14:section>
-        <p14:section name="Comprendre" id="{c5aca34f-2a68-f84d-9ca7-f4abc112e12a}">
+        <p14:section name="Comprendre" id="{f6984404-388c-8558-5778-0b04cabe8055}">
           <p14:sldIdLst>
             <p14:sldId id="259"/>
             <p14:sldId id="260"/>
@@ -158,7 +158,7 @@
             <p14:sldId id="268"/>
           </p14:sldIdLst>
         </p14:section>
-        <p14:section name="JIJ NU ! — Oefeningen" id="{9f4e2ff3-3383-c85b-5e57-221f1ed2536c}">
+        <p14:section name="JIJ NU ! — Oefeningen" id="{c07e06f9-12ce-f56e-d37b-06d609051f17}">
           <p14:sldIdLst>
             <p14:sldId id="269"/>
             <p14:sldId id="270"/>
@@ -175,7 +175,7 @@
             <p14:sldId id="281"/>
           </p14:sldIdLst>
         </p14:section>
-        <p14:section name="Clôture" id="{f1ce061a-a44b-acac-b31f-0f1cd97bebc8}">
+        <p14:section name="Clôture" id="{5bcd3c5b-458b-c9c0-8ce2-30ddc0d39062}">
           <p14:sldIdLst>
             <p14:sldId id="282"/>
           </p14:sldIdLst>

--- a/neerlandais1/powerpoints/Module_12_Modale_werkwoorden.pptx
+++ b/neerlandais1/powerpoints/Module_12_Modale_werkwoorden.pptx
@@ -133,18 +133,18 @@
   <p:extLst>
     <p:ext uri="{521415D9-36F7-43E2-AB2F-B90AF26B5E84}">
       <p14:sectionLst xmlns:p14="http://schemas.microsoft.com/office/powerpoint/2010/main">
-        <p14:section name="Ouverture" id="{cf7883ae-ffc7-2106-f1b8-087cfb6e450a}">
+        <p14:section name="Ouverture" id="{78b3c406-9991-8de3-29cf-d3756c39e36d}">
           <p14:sldIdLst>
             <p14:sldId id="256"/>
           </p14:sldIdLst>
         </p14:section>
-        <p14:section name="Découvrir" id="{1510903e-412b-bee2-eacf-50737a51339d}">
+        <p14:section name="Découvrir" id="{ed311637-4dce-ae05-611b-3b24baedb4da}">
           <p14:sldIdLst>
             <p14:sldId id="257"/>
             <p14:sldId id="258"/>
           </p14:sldIdLst>
         </p14:section>
-        <p14:section name="Comprendre" id="{f6984404-388c-8558-5778-0b04cabe8055}">
+        <p14:section name="Comprendre" id="{1dd4df58-ce2c-62e6-e8e3-dadba90c2d8c}">
           <p14:sldIdLst>
             <p14:sldId id="259"/>
             <p14:sldId id="260"/>
@@ -158,7 +158,7 @@
             <p14:sldId id="268"/>
           </p14:sldIdLst>
         </p14:section>
-        <p14:section name="JIJ NU ! — Oefeningen" id="{c07e06f9-12ce-f56e-d37b-06d609051f17}">
+        <p14:section name="JIJ NU ! — Oefeningen" id="{302e605f-ba13-3424-e49a-3542a6e753cf}">
           <p14:sldIdLst>
             <p14:sldId id="269"/>
             <p14:sldId id="270"/>
@@ -175,7 +175,7 @@
             <p14:sldId id="281"/>
           </p14:sldIdLst>
         </p14:section>
-        <p14:section name="Clôture" id="{5bcd3c5b-458b-c9c0-8ce2-30ddc0d39062}">
+        <p14:section name="Clôture" id="{700e0204-6f72-f73b-f415-3bf17acf5565}">
           <p14:sldIdLst>
             <p14:sldId id="282"/>
           </p14:sldIdLst>

--- a/neerlandais1/powerpoints/Module_12_Modale_werkwoorden.pptx
+++ b/neerlandais1/powerpoints/Module_12_Modale_werkwoorden.pptx
@@ -133,18 +133,18 @@
   <p:extLst>
     <p:ext uri="{521415D9-36F7-43E2-AB2F-B90AF26B5E84}">
       <p14:sectionLst xmlns:p14="http://schemas.microsoft.com/office/powerpoint/2010/main">
-        <p14:section name="Ouverture" id="{78b3c406-9991-8de3-29cf-d3756c39e36d}">
+        <p14:section name="Ouverture" id="{f22db95f-a459-6293-4285-614d5b275656}">
           <p14:sldIdLst>
             <p14:sldId id="256"/>
           </p14:sldIdLst>
         </p14:section>
-        <p14:section name="Découvrir" id="{ed311637-4dce-ae05-611b-3b24baedb4da}">
+        <p14:section name="Découvrir" id="{e0f14247-de03-3c68-2f5c-8a40fb7bb6d2}">
           <p14:sldIdLst>
             <p14:sldId id="257"/>
             <p14:sldId id="258"/>
           </p14:sldIdLst>
         </p14:section>
-        <p14:section name="Comprendre" id="{1dd4df58-ce2c-62e6-e8e3-dadba90c2d8c}">
+        <p14:section name="Comprendre" id="{1ae419cf-27ab-44ad-fd72-26905fd437ae}">
           <p14:sldIdLst>
             <p14:sldId id="259"/>
             <p14:sldId id="260"/>
@@ -158,7 +158,7 @@
             <p14:sldId id="268"/>
           </p14:sldIdLst>
         </p14:section>
-        <p14:section name="JIJ NU ! — Oefeningen" id="{302e605f-ba13-3424-e49a-3542a6e753cf}">
+        <p14:section name="JIJ NU ! — Oefeningen" id="{d5fa2462-c48c-b32d-4236-56a8340a408e}">
           <p14:sldIdLst>
             <p14:sldId id="269"/>
             <p14:sldId id="270"/>
@@ -175,7 +175,7 @@
             <p14:sldId id="281"/>
           </p14:sldIdLst>
         </p14:section>
-        <p14:section name="Clôture" id="{700e0204-6f72-f73b-f415-3bf17acf5565}">
+        <p14:section name="Clôture" id="{486673c0-25a7-3aa0-032d-bcf0391688ed}">
           <p14:sldIdLst>
             <p14:sldId id="282"/>
           </p14:sldIdLst>

--- a/neerlandais1/powerpoints/Module_12_Modale_werkwoorden.pptx
+++ b/neerlandais1/powerpoints/Module_12_Modale_werkwoorden.pptx
@@ -133,18 +133,18 @@
   <p:extLst>
     <p:ext uri="{521415D9-36F7-43E2-AB2F-B90AF26B5E84}">
       <p14:sectionLst xmlns:p14="http://schemas.microsoft.com/office/powerpoint/2010/main">
-        <p14:section name="Ouverture" id="{f22db95f-a459-6293-4285-614d5b275656}">
+        <p14:section name="Ouverture" id="{22b2bc24-f7ee-5285-3c37-6068c3178202}">
           <p14:sldIdLst>
             <p14:sldId id="256"/>
           </p14:sldIdLst>
         </p14:section>
-        <p14:section name="Découvrir" id="{e0f14247-de03-3c68-2f5c-8a40fb7bb6d2}">
+        <p14:section name="Découvrir" id="{b610b820-64f1-6027-1bd0-144b0bf7a4f3}">
           <p14:sldIdLst>
             <p14:sldId id="257"/>
             <p14:sldId id="258"/>
           </p14:sldIdLst>
         </p14:section>
-        <p14:section name="Comprendre" id="{1ae419cf-27ab-44ad-fd72-26905fd437ae}">
+        <p14:section name="Comprendre" id="{377e365c-d5df-6f9f-68da-df54799d11e9}">
           <p14:sldIdLst>
             <p14:sldId id="259"/>
             <p14:sldId id="260"/>
@@ -158,7 +158,7 @@
             <p14:sldId id="268"/>
           </p14:sldIdLst>
         </p14:section>
-        <p14:section name="JIJ NU ! — Oefeningen" id="{d5fa2462-c48c-b32d-4236-56a8340a408e}">
+        <p14:section name="JIJ NU ! — Oefeningen" id="{57ddf3fd-9195-70fa-6495-a9519fb78728}">
           <p14:sldIdLst>
             <p14:sldId id="269"/>
             <p14:sldId id="270"/>
@@ -175,7 +175,7 @@
             <p14:sldId id="281"/>
           </p14:sldIdLst>
         </p14:section>
-        <p14:section name="Clôture" id="{486673c0-25a7-3aa0-032d-bcf0391688ed}">
+        <p14:section name="Clôture" id="{f37fa99a-5207-9bdc-c9d0-451b95743aa4}">
           <p14:sldIdLst>
             <p14:sldId id="282"/>
           </p14:sldIdLst>

--- a/neerlandais1/powerpoints/Module_12_Modale_werkwoorden.pptx
+++ b/neerlandais1/powerpoints/Module_12_Modale_werkwoorden.pptx
@@ -133,18 +133,18 @@
   <p:extLst>
     <p:ext uri="{521415D9-36F7-43E2-AB2F-B90AF26B5E84}">
       <p14:sectionLst xmlns:p14="http://schemas.microsoft.com/office/powerpoint/2010/main">
-        <p14:section name="Ouverture" id="{22b2bc24-f7ee-5285-3c37-6068c3178202}">
+        <p14:section name="Ouverture" id="{e9d4849f-543e-0449-211e-4de3f958bacd}">
           <p14:sldIdLst>
             <p14:sldId id="256"/>
           </p14:sldIdLst>
         </p14:section>
-        <p14:section name="Découvrir" id="{b610b820-64f1-6027-1bd0-144b0bf7a4f3}">
+        <p14:section name="Découvrir" id="{588ceb3d-e369-29a4-13f6-07017ad47c94}">
           <p14:sldIdLst>
             <p14:sldId id="257"/>
             <p14:sldId id="258"/>
           </p14:sldIdLst>
         </p14:section>
-        <p14:section name="Comprendre" id="{377e365c-d5df-6f9f-68da-df54799d11e9}">
+        <p14:section name="Comprendre" id="{24da8283-647c-a03f-574a-0f060f0598e5}">
           <p14:sldIdLst>
             <p14:sldId id="259"/>
             <p14:sldId id="260"/>
@@ -158,7 +158,7 @@
             <p14:sldId id="268"/>
           </p14:sldIdLst>
         </p14:section>
-        <p14:section name="JIJ NU ! — Oefeningen" id="{57ddf3fd-9195-70fa-6495-a9519fb78728}">
+        <p14:section name="JIJ NU ! — Oefeningen" id="{ebfc33b0-27b4-7ef2-194a-8c5623c6b620}">
           <p14:sldIdLst>
             <p14:sldId id="269"/>
             <p14:sldId id="270"/>
@@ -175,7 +175,7 @@
             <p14:sldId id="281"/>
           </p14:sldIdLst>
         </p14:section>
-        <p14:section name="Clôture" id="{f37fa99a-5207-9bdc-c9d0-451b95743aa4}">
+        <p14:section name="Clôture" id="{f9c1fe98-f1a6-89aa-0b72-3d1ae5545f75}">
           <p14:sldIdLst>
             <p14:sldId id="282"/>
           </p14:sldIdLst>

--- a/neerlandais1/powerpoints/Module_12_Modale_werkwoorden.pptx
+++ b/neerlandais1/powerpoints/Module_12_Modale_werkwoorden.pptx
@@ -133,18 +133,18 @@
   <p:extLst>
     <p:ext uri="{521415D9-36F7-43E2-AB2F-B90AF26B5E84}">
       <p14:sectionLst xmlns:p14="http://schemas.microsoft.com/office/powerpoint/2010/main">
-        <p14:section name="Ouverture" id="{e9d4849f-543e-0449-211e-4de3f958bacd}">
+        <p14:section name="Ouverture" id="{ddb76521-ad81-b8a1-1597-6b622c97b1c4}">
           <p14:sldIdLst>
             <p14:sldId id="256"/>
           </p14:sldIdLst>
         </p14:section>
-        <p14:section name="Découvrir" id="{588ceb3d-e369-29a4-13f6-07017ad47c94}">
+        <p14:section name="Découvrir" id="{0bdb3a80-cfc9-7a59-4f57-065077ba9519}">
           <p14:sldIdLst>
             <p14:sldId id="257"/>
             <p14:sldId id="258"/>
           </p14:sldIdLst>
         </p14:section>
-        <p14:section name="Comprendre" id="{24da8283-647c-a03f-574a-0f060f0598e5}">
+        <p14:section name="Comprendre" id="{4c2c62e1-31fc-e102-4a66-93c483cb83cb}">
           <p14:sldIdLst>
             <p14:sldId id="259"/>
             <p14:sldId id="260"/>
@@ -158,7 +158,7 @@
             <p14:sldId id="268"/>
           </p14:sldIdLst>
         </p14:section>
-        <p14:section name="JIJ NU ! — Oefeningen" id="{ebfc33b0-27b4-7ef2-194a-8c5623c6b620}">
+        <p14:section name="JIJ NU ! — Oefeningen" id="{c2b5fbd9-4af6-6f51-f20d-ba6b49ce4480}">
           <p14:sldIdLst>
             <p14:sldId id="269"/>
             <p14:sldId id="270"/>
@@ -175,7 +175,7 @@
             <p14:sldId id="281"/>
           </p14:sldIdLst>
         </p14:section>
-        <p14:section name="Clôture" id="{f9c1fe98-f1a6-89aa-0b72-3d1ae5545f75}">
+        <p14:section name="Clôture" id="{f50a6278-8a48-9ea3-020b-f66863507b50}">
           <p14:sldIdLst>
             <p14:sldId id="282"/>
           </p14:sldIdLst>

--- a/neerlandais1/powerpoints/Module_12_Modale_werkwoorden.pptx
+++ b/neerlandais1/powerpoints/Module_12_Modale_werkwoorden.pptx
@@ -133,18 +133,18 @@
   <p:extLst>
     <p:ext uri="{521415D9-36F7-43E2-AB2F-B90AF26B5E84}">
       <p14:sectionLst xmlns:p14="http://schemas.microsoft.com/office/powerpoint/2010/main">
-        <p14:section name="Ouverture" id="{ddb76521-ad81-b8a1-1597-6b622c97b1c4}">
+        <p14:section name="Ouverture" id="{d7a08c6a-c11c-09b4-732b-3ba078dc927f}">
           <p14:sldIdLst>
             <p14:sldId id="256"/>
           </p14:sldIdLst>
         </p14:section>
-        <p14:section name="Découvrir" id="{0bdb3a80-cfc9-7a59-4f57-065077ba9519}">
+        <p14:section name="Découvrir" id="{8217723f-506c-70d5-ff32-60018be6f4c8}">
           <p14:sldIdLst>
             <p14:sldId id="257"/>
             <p14:sldId id="258"/>
           </p14:sldIdLst>
         </p14:section>
-        <p14:section name="Comprendre" id="{4c2c62e1-31fc-e102-4a66-93c483cb83cb}">
+        <p14:section name="Comprendre" id="{d97f2f91-da72-775b-cb21-ec5c8922f160}">
           <p14:sldIdLst>
             <p14:sldId id="259"/>
             <p14:sldId id="260"/>
@@ -158,7 +158,7 @@
             <p14:sldId id="268"/>
           </p14:sldIdLst>
         </p14:section>
-        <p14:section name="JIJ NU ! — Oefeningen" id="{c2b5fbd9-4af6-6f51-f20d-ba6b49ce4480}">
+        <p14:section name="JIJ NU ! — Oefeningen" id="{2f9c7603-6adf-e39a-5bf1-6db78aac903b}">
           <p14:sldIdLst>
             <p14:sldId id="269"/>
             <p14:sldId id="270"/>
@@ -175,7 +175,7 @@
             <p14:sldId id="281"/>
           </p14:sldIdLst>
         </p14:section>
-        <p14:section name="Clôture" id="{f50a6278-8a48-9ea3-020b-f66863507b50}">
+        <p14:section name="Clôture" id="{acd02dd9-1342-2d11-d5f7-3c3561d6d835}">
           <p14:sldIdLst>
             <p14:sldId id="282"/>
           </p14:sldIdLst>

--- a/neerlandais1/powerpoints/Module_12_Modale_werkwoorden.pptx
+++ b/neerlandais1/powerpoints/Module_12_Modale_werkwoorden.pptx
@@ -133,18 +133,18 @@
   <p:extLst>
     <p:ext uri="{521415D9-36F7-43E2-AB2F-B90AF26B5E84}">
       <p14:sectionLst xmlns:p14="http://schemas.microsoft.com/office/powerpoint/2010/main">
-        <p14:section name="Ouverture" id="{d7a08c6a-c11c-09b4-732b-3ba078dc927f}">
+        <p14:section name="Ouverture" id="{54b0115b-fcfb-c2db-1ee6-217e245e9b7e}">
           <p14:sldIdLst>
             <p14:sldId id="256"/>
           </p14:sldIdLst>
         </p14:section>
-        <p14:section name="Découvrir" id="{8217723f-506c-70d5-ff32-60018be6f4c8}">
+        <p14:section name="Découvrir" id="{b45992ac-bf4a-9320-20d5-44d705b9ae7a}">
           <p14:sldIdLst>
             <p14:sldId id="257"/>
             <p14:sldId id="258"/>
           </p14:sldIdLst>
         </p14:section>
-        <p14:section name="Comprendre" id="{d97f2f91-da72-775b-cb21-ec5c8922f160}">
+        <p14:section name="Comprendre" id="{35151521-b902-500a-e04f-c64d147840d5}">
           <p14:sldIdLst>
             <p14:sldId id="259"/>
             <p14:sldId id="260"/>
@@ -158,7 +158,7 @@
             <p14:sldId id="268"/>
           </p14:sldIdLst>
         </p14:section>
-        <p14:section name="JIJ NU ! — Oefeningen" id="{2f9c7603-6adf-e39a-5bf1-6db78aac903b}">
+        <p14:section name="JIJ NU ! — Oefeningen" id="{b3adf48a-6169-6ed8-2cab-899325c351fe}">
           <p14:sldIdLst>
             <p14:sldId id="269"/>
             <p14:sldId id="270"/>
@@ -175,7 +175,7 @@
             <p14:sldId id="281"/>
           </p14:sldIdLst>
         </p14:section>
-        <p14:section name="Clôture" id="{acd02dd9-1342-2d11-d5f7-3c3561d6d835}">
+        <p14:section name="Clôture" id="{53271cbb-b6e5-137b-bb98-d10fd7bc2b2a}">
           <p14:sldIdLst>
             <p14:sldId id="282"/>
           </p14:sldIdLst>
